--- a/1st_document/기획서.pptx
+++ b/1st_document/기획서.pptx
@@ -2,7 +2,7 @@
 <file path=ppt/presentation.xml><?xml version="1.0" encoding="utf-8"?>
 <p:presentation xmlns:a="http://schemas.openxmlformats.org/drawingml/2006/main" xmlns:r="http://schemas.openxmlformats.org/officeDocument/2006/relationships" xmlns:p="http://schemas.openxmlformats.org/presentationml/2006/main" xmlns:p14="http://schemas.microsoft.com/office/powerpoint/2010/main" saveSubsetFonts="1">
   <p:sldMasterIdLst>
-    <p:sldMasterId id="2147483691" r:id="rId13"/>
+    <p:sldMasterId id="2147483692" r:id="rId13"/>
   </p:sldMasterIdLst>
   <p:notesMasterIdLst>
     <p:notesMasterId r:id="rId17"/>
@@ -3630,9 +3630,9 @@
           <p:nvPr/>
         </p:nvSpPr>
         <p:spPr>
-          <a:xfrm rot="0">
+          <a:xfrm>
             <a:off x="1797050" y="1856740"/>
-            <a:ext cx="8995410" cy="1478280"/>
+            <a:ext cx="8996045" cy="1015365"/>
           </a:xfrm>
           <a:prstGeom prst="rect"/>
           <a:noFill/>
@@ -3642,7 +3642,7 @@
           </a:ln>
         </p:spPr>
         <p:txBody>
-          <a:bodyPr wrap="square" lIns="89535" tIns="46355" rIns="89535" bIns="46355" vert="horz" anchor="t">
+          <a:bodyPr wrap="square" lIns="89535" tIns="46355" rIns="89535" bIns="46355" numCol="1" vert="horz" anchor="t">
             <a:spAutoFit/>
           </a:bodyPr>
           <a:lstStyle/>
@@ -3658,9 +3658,28 @@
                 </a:solidFill>
                 <a:latin typeface="맑은 고딕" charset="0"/>
                 <a:ea typeface="맑은 고딕" charset="0"/>
-                <a:sym typeface="맑은 고딕" charset="0"/>
-              </a:rPr>
-              <a:t>AI 기술을 활용한 데이터 분석을 통해 딸기 스마트팜 농가에 </a:t>
+              </a:rPr>
+              <a:t>AI 기술을 활용한 데이터 분석을 통해 </a:t>
+            </a:r>
+            <a:r>
+              <a:rPr sz="2000">
+                <a:solidFill>
+                  <a:schemeClr val="tx1"/>
+                </a:solidFill>
+                <a:latin typeface="맑은 고딕" charset="0"/>
+                <a:ea typeface="맑은 고딕" charset="0"/>
+              </a:rPr>
+              <a:t>파프리카</a:t>
+            </a:r>
+            <a:r>
+              <a:rPr sz="2000">
+                <a:solidFill>
+                  <a:schemeClr val="tx1"/>
+                </a:solidFill>
+                <a:latin typeface="맑은 고딕" charset="0"/>
+                <a:ea typeface="맑은 고딕" charset="0"/>
+              </a:rPr>
+              <a:t> 스마트팜 농가에 </a:t>
             </a:r>
             <a:r>
               <a:rPr sz="2000" b="1">
@@ -3669,7 +3688,6 @@
                 </a:solidFill>
                 <a:latin typeface="맑은 고딕" charset="0"/>
                 <a:ea typeface="맑은 고딕" charset="0"/>
-                <a:sym typeface="맑은 고딕" charset="0"/>
               </a:rPr>
               <a:t>최적화된 환경</a:t>
             </a:r>
@@ -3680,9 +3698,18 @@
                 </a:solidFill>
                 <a:latin typeface="맑은 고딕" charset="0"/>
                 <a:ea typeface="맑은 고딕" charset="0"/>
-                <a:sym typeface="맑은 고딕" charset="0"/>
-              </a:rPr>
-              <a:t>을 제시하고,</a:t>
+              </a:rPr>
+              <a:t>을 제시하고, 날씨에 따른 전국 파프리카 출하량을 예측하여 농가의 </a:t>
+            </a:r>
+            <a:r>
+              <a:rPr sz="2000" b="1">
+                <a:solidFill>
+                  <a:schemeClr val="tx1"/>
+                </a:solidFill>
+                <a:latin typeface="맑은 고딕" charset="0"/>
+                <a:ea typeface="맑은 고딕" charset="0"/>
+              </a:rPr>
+              <a:t>수익을 극대화</a:t>
             </a:r>
             <a:r>
               <a:rPr sz="2000">
@@ -3691,66 +3718,13 @@
                 </a:solidFill>
                 <a:latin typeface="맑은 고딕" charset="0"/>
                 <a:ea typeface="맑은 고딕" charset="0"/>
-                <a:sym typeface="맑은 고딕" charset="0"/>
-              </a:rPr>
-              <a:t> </a:t>
-            </a:r>
-            <a:r>
-              <a:rPr sz="2000">
-                <a:solidFill>
-                  <a:schemeClr val="tx1"/>
-                </a:solidFill>
-                <a:latin typeface="맑은 고딕" charset="0"/>
-                <a:ea typeface="맑은 고딕" charset="0"/>
-                <a:sym typeface="맑은 고딕" charset="0"/>
-              </a:rPr>
-              <a:t>날씨에 따른 전국 </a:t>
-            </a:r>
-            <a:r>
-              <a:rPr sz="2000">
-                <a:solidFill>
-                  <a:schemeClr val="tx1"/>
-                </a:solidFill>
-                <a:latin typeface="맑은 고딕" charset="0"/>
-                <a:ea typeface="맑은 고딕" charset="0"/>
-                <a:sym typeface="맑은 고딕" charset="0"/>
-              </a:rPr>
-              <a:t>파프리카</a:t>
-            </a:r>
-            <a:r>
-              <a:rPr sz="2000">
-                <a:solidFill>
-                  <a:schemeClr val="tx1"/>
-                </a:solidFill>
-                <a:latin typeface="맑은 고딕" charset="0"/>
-                <a:ea typeface="맑은 고딕" charset="0"/>
-                <a:sym typeface="맑은 고딕" charset="0"/>
-              </a:rPr>
-              <a:t> 출하량을 예측하여 농가의 </a:t>
-            </a:r>
-            <a:r>
-              <a:rPr sz="2000" b="1">
-                <a:solidFill>
-                  <a:schemeClr val="tx1"/>
-                </a:solidFill>
-                <a:latin typeface="맑은 고딕" charset="0"/>
-                <a:ea typeface="맑은 고딕" charset="0"/>
-                <a:sym typeface="맑은 고딕" charset="0"/>
-              </a:rPr>
-              <a:t>수익을 극대화</a:t>
-            </a:r>
-            <a:r>
-              <a:rPr sz="2000">
-                <a:solidFill>
-                  <a:schemeClr val="tx1"/>
-                </a:solidFill>
-                <a:latin typeface="맑은 고딕" charset="0"/>
-                <a:ea typeface="맑은 고딕" charset="0"/>
-                <a:sym typeface="맑은 고딕" charset="0"/>
               </a:rPr>
               <a:t>하는 서비스를 제공한다.</a:t>
             </a:r>
-            <a:endParaRPr lang="ko-KR" altLang="en-US" sz="2800" b="1">
+            <a:endParaRPr lang="ko-KR" altLang="en-US" sz="2000">
+              <a:solidFill>
+                <a:schemeClr val="tx1"/>
+              </a:solidFill>
               <a:latin typeface="맑은 고딕" charset="0"/>
               <a:ea typeface="맑은 고딕" charset="0"/>
             </a:endParaRPr>
